--- a/powerpoint/Dino Game.pptx
+++ b/powerpoint/Dino Game.pptx
@@ -15,6 +15,7 @@
     <p:sldId id="260" r:id="rId9"/>
     <p:sldId id="261" r:id="rId10"/>
     <p:sldId id="265" r:id="rId11"/>
+    <p:sldId id="266" r:id="rId12"/>
   </p:sldIdLst>
   <p:sldSz cx="12192000" cy="6858000"/>
   <p:notesSz cx="6858000" cy="9144000"/>
@@ -113,6 +114,11 @@
       </a:defRPr>
     </a:lvl9pPr>
   </p:defaultTextStyle>
+  <p:extLst>
+    <p:ext uri="{EFAFB233-063F-42B5-8137-9DF3F51BA10A}">
+      <p15:sldGuideLst xmlns:p15="http://schemas.microsoft.com/office/powerpoint/2012/main"/>
+    </p:ext>
+  </p:extLst>
 </p:presentation>
 </file>
 
@@ -688,7 +694,7 @@
           <a:p>
             <a:fld id="{7774B687-9599-40D7-9EDC-52FA3AE6DF1B}" type="datetimeFigureOut">
               <a:rPr lang="en-US" smtClean="0"/>
-              <a:t>5/13/2025</a:t>
+              <a:t>5/14/2025</a:t>
             </a:fld>
             <a:endParaRPr lang="en-US"/>
           </a:p>
@@ -916,7 +922,7 @@
           <a:p>
             <a:fld id="{7774B687-9599-40D7-9EDC-52FA3AE6DF1B}" type="datetimeFigureOut">
               <a:rPr lang="en-US" smtClean="0"/>
-              <a:t>5/13/2025</a:t>
+              <a:t>5/14/2025</a:t>
             </a:fld>
             <a:endParaRPr lang="en-US"/>
           </a:p>
@@ -1096,7 +1102,7 @@
           <a:p>
             <a:fld id="{7774B687-9599-40D7-9EDC-52FA3AE6DF1B}" type="datetimeFigureOut">
               <a:rPr lang="en-US" smtClean="0"/>
-              <a:t>5/13/2025</a:t>
+              <a:t>5/14/2025</a:t>
             </a:fld>
             <a:endParaRPr lang="en-US"/>
           </a:p>
@@ -1266,7 +1272,7 @@
           <a:p>
             <a:fld id="{7774B687-9599-40D7-9EDC-52FA3AE6DF1B}" type="datetimeFigureOut">
               <a:rPr lang="en-US" smtClean="0"/>
-              <a:t>5/13/2025</a:t>
+              <a:t>5/14/2025</a:t>
             </a:fld>
             <a:endParaRPr lang="en-US"/>
           </a:p>
@@ -1520,7 +1526,7 @@
           <a:p>
             <a:fld id="{7774B687-9599-40D7-9EDC-52FA3AE6DF1B}" type="datetimeFigureOut">
               <a:rPr lang="en-US" smtClean="0"/>
-              <a:t>5/13/2025</a:t>
+              <a:t>5/14/2025</a:t>
             </a:fld>
             <a:endParaRPr lang="en-US"/>
           </a:p>
@@ -1846,7 +1852,7 @@
           <a:p>
             <a:fld id="{7774B687-9599-40D7-9EDC-52FA3AE6DF1B}" type="datetimeFigureOut">
               <a:rPr lang="en-US" smtClean="0"/>
-              <a:t>5/13/2025</a:t>
+              <a:t>5/14/2025</a:t>
             </a:fld>
             <a:endParaRPr lang="en-US"/>
           </a:p>
@@ -2297,7 +2303,7 @@
           <a:p>
             <a:fld id="{7774B687-9599-40D7-9EDC-52FA3AE6DF1B}" type="datetimeFigureOut">
               <a:rPr lang="en-US" smtClean="0"/>
-              <a:t>5/13/2025</a:t>
+              <a:t>5/14/2025</a:t>
             </a:fld>
             <a:endParaRPr lang="en-US"/>
           </a:p>
@@ -2415,7 +2421,7 @@
           <a:p>
             <a:fld id="{7774B687-9599-40D7-9EDC-52FA3AE6DF1B}" type="datetimeFigureOut">
               <a:rPr lang="en-US" smtClean="0"/>
-              <a:t>5/13/2025</a:t>
+              <a:t>5/14/2025</a:t>
             </a:fld>
             <a:endParaRPr lang="en-US"/>
           </a:p>
@@ -2510,7 +2516,7 @@
           <a:p>
             <a:fld id="{7774B687-9599-40D7-9EDC-52FA3AE6DF1B}" type="datetimeFigureOut">
               <a:rPr lang="en-US" smtClean="0"/>
-              <a:t>5/13/2025</a:t>
+              <a:t>5/14/2025</a:t>
             </a:fld>
             <a:endParaRPr lang="en-US"/>
           </a:p>
@@ -2797,7 +2803,7 @@
           <a:p>
             <a:fld id="{7774B687-9599-40D7-9EDC-52FA3AE6DF1B}" type="datetimeFigureOut">
               <a:rPr lang="en-US" smtClean="0"/>
-              <a:t>5/13/2025</a:t>
+              <a:t>5/14/2025</a:t>
             </a:fld>
             <a:endParaRPr lang="en-US"/>
           </a:p>
@@ -3119,7 +3125,7 @@
           <a:p>
             <a:fld id="{7774B687-9599-40D7-9EDC-52FA3AE6DF1B}" type="datetimeFigureOut">
               <a:rPr lang="en-US" smtClean="0"/>
-              <a:t>5/13/2025</a:t>
+              <a:t>5/14/2025</a:t>
             </a:fld>
             <a:endParaRPr lang="en-US"/>
           </a:p>
@@ -3373,7 +3379,7 @@
           <a:p>
             <a:fld id="{7774B687-9599-40D7-9EDC-52FA3AE6DF1B}" type="datetimeFigureOut">
               <a:rPr lang="en-US" smtClean="0"/>
-              <a:t>5/13/2025</a:t>
+              <a:t>5/14/2025</a:t>
             </a:fld>
             <a:endParaRPr lang="en-US"/>
           </a:p>
@@ -4016,6 +4022,169 @@
 </p:sld>
 </file>
 
+<file path=ppt/slides/slide11.xml><?xml version="1.0" encoding="utf-8"?>
+<p:sld xmlns:a="http://schemas.openxmlformats.org/drawingml/2006/main" xmlns:r="http://schemas.openxmlformats.org/officeDocument/2006/relationships" xmlns:p="http://schemas.openxmlformats.org/presentationml/2006/main">
+  <p:cSld>
+    <p:spTree>
+      <p:nvGrpSpPr>
+        <p:cNvPr id="1" name=""/>
+        <p:cNvGrpSpPr/>
+        <p:nvPr/>
+      </p:nvGrpSpPr>
+      <p:grpSpPr>
+        <a:xfrm>
+          <a:off x="0" y="0"/>
+          <a:ext cx="0" cy="0"/>
+          <a:chOff x="0" y="0"/>
+          <a:chExt cx="0" cy="0"/>
+        </a:xfrm>
+      </p:grpSpPr>
+      <p:sp>
+        <p:nvSpPr>
+          <p:cNvPr id="2" name="Title 1">
+            <a:extLst>
+              <a:ext uri="{FF2B5EF4-FFF2-40B4-BE49-F238E27FC236}">
+                <a16:creationId xmlns:a16="http://schemas.microsoft.com/office/drawing/2014/main" id="{B7E6CD28-EF4F-95B5-A57D-E4EAF68C9DD9}"/>
+              </a:ext>
+            </a:extLst>
+          </p:cNvPr>
+          <p:cNvSpPr>
+            <a:spLocks noGrp="1"/>
+          </p:cNvSpPr>
+          <p:nvPr>
+            <p:ph type="title"/>
+          </p:nvPr>
+        </p:nvSpPr>
+        <p:spPr/>
+        <p:txBody>
+          <a:bodyPr/>
+          <a:lstStyle/>
+          <a:p>
+            <a:r>
+              <a:rPr lang="en-US" dirty="0"/>
+              <a:t>Credit for Sound </a:t>
+            </a:r>
+            <a:r>
+              <a:rPr lang="en-US" dirty="0" err="1"/>
+              <a:t>Sssets</a:t>
+            </a:r>
+            <a:endParaRPr lang="en-CA" dirty="0"/>
+          </a:p>
+        </p:txBody>
+      </p:sp>
+      <p:sp>
+        <p:nvSpPr>
+          <p:cNvPr id="3" name="Content Placeholder 2">
+            <a:extLst>
+              <a:ext uri="{FF2B5EF4-FFF2-40B4-BE49-F238E27FC236}">
+                <a16:creationId xmlns:a16="http://schemas.microsoft.com/office/drawing/2014/main" id="{349C34E1-A08B-6CF5-7A94-867F7B90E971}"/>
+              </a:ext>
+            </a:extLst>
+          </p:cNvPr>
+          <p:cNvSpPr>
+            <a:spLocks noGrp="1"/>
+          </p:cNvSpPr>
+          <p:nvPr>
+            <p:ph idx="1"/>
+          </p:nvPr>
+        </p:nvSpPr>
+        <p:spPr/>
+        <p:txBody>
+          <a:bodyPr/>
+          <a:lstStyle/>
+          <a:p>
+            <a:r>
+              <a:rPr lang="en-US" dirty="0"/>
+              <a:t>water scene – https://benjijam.itch.io/underwater-themes </a:t>
+            </a:r>
+          </a:p>
+          <a:p>
+            <a:r>
+              <a:rPr lang="en-US" dirty="0"/>
+              <a:t>coin </a:t>
+            </a:r>
+            <a:r>
+              <a:rPr lang="en-US" dirty="0" err="1"/>
+              <a:t>sfx</a:t>
+            </a:r>
+            <a:r>
+              <a:rPr lang="en-US" dirty="0"/>
+              <a:t>: Author: </a:t>
+            </a:r>
+            <a:r>
+              <a:rPr lang="en-US" dirty="0" err="1"/>
+              <a:t>wobbleboxxSunday</a:t>
+            </a:r>
+            <a:r>
+              <a:rPr lang="en-US" dirty="0"/>
+              <a:t>, November 16, 2014 - 08:49Art Type: Sound Effect</a:t>
+            </a:r>
+          </a:p>
+          <a:p>
+            <a:r>
+              <a:rPr lang="en-US" dirty="0">
+                <a:latin typeface="gg sans"/>
+              </a:rPr>
+              <a:t>C</a:t>
+            </a:r>
+            <a:r>
+              <a:rPr lang="en-US" b="0" i="0" dirty="0">
+                <a:effectLst/>
+                <a:latin typeface="gg sans"/>
+              </a:rPr>
+              <a:t>redit for field of dreams Author: </a:t>
+            </a:r>
+            <a:r>
+              <a:rPr lang="en-US" b="0" i="0" dirty="0" err="1">
+                <a:effectLst/>
+                <a:latin typeface="gg sans"/>
+              </a:rPr>
+              <a:t>pauliuw</a:t>
+            </a:r>
+            <a:r>
+              <a:rPr lang="en-US" b="0" i="0" dirty="0">
+                <a:effectLst/>
+                <a:latin typeface="gg sans"/>
+              </a:rPr>
+              <a:t> Wednesday, December 8, 2010 - 05:37</a:t>
+            </a:r>
+          </a:p>
+          <a:p>
+            <a:r>
+              <a:rPr lang="en-US" dirty="0">
+                <a:latin typeface="gg sans"/>
+              </a:rPr>
+              <a:t>Victory music: </a:t>
+            </a:r>
+            <a:r>
+              <a:rPr lang="en-US" dirty="0">
+                <a:latin typeface="gg sans"/>
+                <a:hlinkClick r:id="rId2"/>
+              </a:rPr>
+              <a:t>https://xdeviruchi.itch.io/16-bit-fantasy-adventure-music-pack</a:t>
+            </a:r>
+            <a:endParaRPr lang="en-US" dirty="0">
+              <a:latin typeface="gg sans"/>
+            </a:endParaRPr>
+          </a:p>
+          <a:p>
+            <a:endParaRPr lang="en-CA" dirty="0"/>
+          </a:p>
+        </p:txBody>
+      </p:sp>
+    </p:spTree>
+    <p:extLst>
+      <p:ext uri="{BB962C8B-B14F-4D97-AF65-F5344CB8AC3E}">
+        <p14:creationId xmlns:p14="http://schemas.microsoft.com/office/powerpoint/2010/main" val="4242896871"/>
+      </p:ext>
+    </p:extLst>
+  </p:cSld>
+  <p:clrMapOvr>
+    <a:masterClrMapping/>
+  </p:clrMapOvr>
+</p:sld>
+</file>
+
 <file path=ppt/slides/slide2.xml><?xml version="1.0" encoding="utf-8"?>
 <p:sld xmlns:a="http://schemas.openxmlformats.org/drawingml/2006/main" xmlns:r="http://schemas.openxmlformats.org/officeDocument/2006/relationships" xmlns:p="http://schemas.openxmlformats.org/presentationml/2006/main">
   <p:cSld>
@@ -4768,7 +4937,7 @@
             </a:pPr>
             <a:r>
               <a:rPr lang="en-US" dirty="0"/>
-              <a:t>Weapons</a:t>
+              <a:t>Weapons ( + weapon switching)</a:t>
             </a:r>
           </a:p>
           <a:p>
@@ -4779,6 +4948,56 @@
             <a:r>
               <a:rPr lang="en-US" dirty="0"/>
               <a:t>Dialogue</a:t>
+            </a:r>
+          </a:p>
+          <a:p>
+            <a:pPr marL="742950" lvl="1" indent="-285750">
+              <a:buFont typeface="Arial" panose="020B0604020202020204" pitchFamily="34" charset="0"/>
+              <a:buChar char="•"/>
+            </a:pPr>
+            <a:r>
+              <a:rPr lang="en-US" dirty="0"/>
+              <a:t>Level logic</a:t>
+            </a:r>
+          </a:p>
+          <a:p>
+            <a:pPr marL="742950" lvl="1" indent="-285750">
+              <a:buFont typeface="Arial" panose="020B0604020202020204" pitchFamily="34" charset="0"/>
+              <a:buChar char="•"/>
+            </a:pPr>
+            <a:r>
+              <a:rPr lang="en-US" dirty="0"/>
+              <a:t>Level scaling </a:t>
+            </a:r>
+          </a:p>
+          <a:p>
+            <a:pPr marL="742950" lvl="1" indent="-285750">
+              <a:buFont typeface="Arial" panose="020B0604020202020204" pitchFamily="34" charset="0"/>
+              <a:buChar char="•"/>
+            </a:pPr>
+            <a:r>
+              <a:rPr lang="en-US" dirty="0"/>
+              <a:t>Level + coin UI</a:t>
+            </a:r>
+          </a:p>
+          <a:p>
+            <a:pPr marL="742950" lvl="1" indent="-285750">
+              <a:buFont typeface="Arial" panose="020B0604020202020204" pitchFamily="34" charset="0"/>
+              <a:buChar char="•"/>
+            </a:pPr>
+            <a:r>
+              <a:rPr lang="en-US" dirty="0"/>
+              <a:t>“Skull” collectable</a:t>
+            </a:r>
+          </a:p>
+          <a:p>
+            <a:pPr marL="742950" lvl="1" indent="-285750">
+              <a:buFont typeface="Arial" panose="020B0604020202020204" pitchFamily="34" charset="0"/>
+              <a:buChar char="•"/>
+            </a:pPr>
+            <a:r>
+              <a:rPr lang="en-US" dirty="0"/>
+              <a:t>Win condition </a:t>
             </a:r>
           </a:p>
           <a:p>
@@ -4840,6 +5059,53 @@
           </a:prstGeom>
         </p:spPr>
       </p:pic>
+      <p:pic>
+        <p:nvPicPr>
+          <p:cNvPr id="1026" name="Picture 2">
+            <a:extLst>
+              <a:ext uri="{FF2B5EF4-FFF2-40B4-BE49-F238E27FC236}">
+                <a16:creationId xmlns:a16="http://schemas.microsoft.com/office/drawing/2014/main" id="{022C1335-7A3E-D35A-C5F3-34B68326F41C}"/>
+              </a:ext>
+            </a:extLst>
+          </p:cNvPr>
+          <p:cNvPicPr>
+            <a:picLocks noChangeAspect="1" noChangeArrowheads="1"/>
+          </p:cNvPicPr>
+          <p:nvPr/>
+        </p:nvPicPr>
+        <p:blipFill>
+          <a:blip r:embed="rId4">
+            <a:extLst>
+              <a:ext uri="{28A0092B-C50C-407E-A947-70E740481C1C}">
+                <a14:useLocalDpi xmlns:a14="http://schemas.microsoft.com/office/drawing/2010/main" val="0"/>
+              </a:ext>
+            </a:extLst>
+          </a:blip>
+          <a:srcRect/>
+          <a:stretch>
+            <a:fillRect/>
+          </a:stretch>
+        </p:blipFill>
+        <p:spPr bwMode="auto">
+          <a:xfrm>
+            <a:off x="8283516" y="529874"/>
+            <a:ext cx="2772007" cy="2617225"/>
+          </a:xfrm>
+          <a:prstGeom prst="rect">
+            <a:avLst/>
+          </a:prstGeom>
+          <a:noFill/>
+          <a:extLst>
+            <a:ext uri="{909E8E84-426E-40DD-AFC4-6F175D3DCCD1}">
+              <a14:hiddenFill xmlns:a14="http://schemas.microsoft.com/office/drawing/2010/main">
+                <a:solidFill>
+                  <a:srgbClr val="FFFFFF"/>
+                </a:solidFill>
+              </a14:hiddenFill>
+            </a:ext>
+          </a:extLst>
+        </p:spPr>
+      </p:pic>
     </p:spTree>
     <p:extLst>
       <p:ext uri="{BB962C8B-B14F-4D97-AF65-F5344CB8AC3E}">
@@ -5032,6 +5298,24 @@
             </a:r>
           </a:p>
           <a:p>
+            <a:r>
+              <a:rPr lang="en-US" dirty="0"/>
+              <a:t>Character + enemy animations</a:t>
+            </a:r>
+          </a:p>
+          <a:p>
+            <a:r>
+              <a:rPr lang="en-US" dirty="0"/>
+              <a:t>Level logic</a:t>
+            </a:r>
+          </a:p>
+          <a:p>
+            <a:r>
+              <a:rPr lang="en-US" dirty="0"/>
+              <a:t>UI</a:t>
+            </a:r>
+          </a:p>
+          <a:p>
             <a:endParaRPr lang="en-US" dirty="0"/>
           </a:p>
         </p:txBody>
@@ -5110,12 +5394,26 @@
             <p:ph idx="1"/>
           </p:nvPr>
         </p:nvSpPr>
-        <p:spPr/>
-        <p:txBody>
-          <a:bodyPr/>
-          <a:lstStyle/>
-          <a:p>
-            <a:endParaRPr lang="en-US" dirty="0"/>
+        <p:spPr>
+          <a:xfrm>
+            <a:off x="327808" y="1927123"/>
+            <a:ext cx="8595360" cy="4351337"/>
+          </a:xfrm>
+        </p:spPr>
+        <p:txBody>
+          <a:bodyPr/>
+          <a:lstStyle/>
+          <a:p>
+            <a:r>
+              <a:rPr lang="en-US" dirty="0"/>
+              <a:t>Added less global scripts ( we have about 5 or 6 when in reality we could’ve used just 1 or 2)</a:t>
+            </a:r>
+          </a:p>
+          <a:p>
+            <a:r>
+              <a:rPr lang="en-US" dirty="0"/>
+              <a:t>Researched the dialogue system a bit more</a:t>
+            </a:r>
           </a:p>
         </p:txBody>
       </p:sp>
